--- a/resources/board-ai-briefing-pack-template.pptx
+++ b/resources/board-ai-briefing-pack-template.pptx
@@ -4932,7 +4932,7 @@
                 <a:ea typeface="Calibri" pitchFamily="34" charset="-122"/>
                 <a:cs typeface="Calibri" pitchFamily="34" charset="-120"/>
               </a:rPr>
-              <a:t>advisor@rodney-ai.com</a:t>
+              <a:t>rodney@theenterpriseai.co.uk</a:t>
             </a:r>
             <a:endParaRPr lang="en-US" sz="1100" dirty="0"/>
           </a:p>
@@ -4949,7 +4949,7 @@
                 <a:ea typeface="Calibri" pitchFamily="34" charset="-122"/>
                 <a:cs typeface="Calibri" pitchFamily="34" charset="-120"/>
               </a:rPr>
-              <a:t>Rodney.AI AI Advisory Practice</a:t>
+              <a:t>Enterprise.AI AI Advisory Practice</a:t>
             </a:r>
             <a:endParaRPr lang="en-US" sz="1100" dirty="0"/>
           </a:p>
@@ -16741,7 +16741,7 @@
                 <a:ea typeface="Calibri" pitchFamily="34" charset="-122"/>
                 <a:cs typeface="Calibri" pitchFamily="34" charset="-120"/>
               </a:rPr>
-              <a:t>Rodney.AI, Deloitte</a:t>
+              <a:t>Enterprise.AI, Deloitte</a:t>
             </a:r>
             <a:endParaRPr lang="en-US" sz="900" dirty="0"/>
           </a:p>
